--- a/decks/geog-climate-change/geog-climate-change_ch6_adaptation.pptx
+++ b/decks/geog-climate-change/geog-climate-change_ch6_adaptation.pptx
@@ -126,30 +126,30 @@
   <p:extLst>
     <p:ext uri="{521415D9-36F7-43E2-AB2F-B90AF26B5E84}">
       <p14:sectionLst xmlns:p14="http://schemas.microsoft.com/office/powerpoint/2010/main">
-        <p14:section name="Opening" id="{5ad705f8-1035-5cdb-5ae2-5c07a00e9503}">
+        <p14:section name="Opening" id="{92c1dc7a-faa6-d7cc-0e94-09f9f51ff194}">
           <p14:sldIdLst>
             <p14:sldId id="256"/>
           </p14:sldIdLst>
         </p14:section>
-        <p14:section name="Gate" id="{fcce542e-51c4-d99b-ab4e-7151dd62dffd}">
+        <p14:section name="Gate" id="{03e6c749-5e71-fad0-700d-9ce5df7a642c}">
           <p14:sldIdLst>
             <p14:sldId id="257"/>
             <p14:sldId id="258"/>
           </p14:sldIdLst>
         </p14:section>
-        <p14:section name="Pre-teach" id="{e13293fd-99c6-e1f6-bf65-722431f84968}">
+        <p14:section name="Pre-teach" id="{ef5d26aa-10db-f517-3a69-dae45cba85a8}">
           <p14:sldIdLst>
             <p14:sldId id="259"/>
             <p14:sldId id="260"/>
           </p14:sldIdLst>
         </p14:section>
-        <p14:section name="Read-along" id="{ce11e039-f53d-b01d-c786-ccdb016983aa}">
+        <p14:section name="Read-along" id="{afc15b26-5a95-a573-54e1-424f03898253}">
           <p14:sldIdLst>
             <p14:sldId id="261"/>
             <p14:sldId id="262"/>
           </p14:sldIdLst>
         </p14:section>
-        <p14:section name="Teach" id="{6cc060e3-2abf-fde8-9bc9-5d889585eff8}">
+        <p14:section name="Teach" id="{01456081-520b-80a3-baa1-71f7b1dec172}">
           <p14:sldIdLst>
             <p14:sldId id="263"/>
             <p14:sldId id="264"/>
@@ -158,7 +158,7 @@
             <p14:sldId id="267"/>
           </p14:sldIdLst>
         </p14:section>
-        <p14:section name="Routes" id="{a1394b58-9b6a-7e7f-0b79-02893211a648}">
+        <p14:section name="Routes" id="{6b10f2a4-9237-4d31-fc05-f12a22490100}">
           <p14:sldIdLst>
             <p14:sldId id="268"/>
             <p14:sldId id="269"/>
@@ -166,12 +166,12 @@
             <p14:sldId id="271"/>
           </p14:sldIdLst>
         </p14:section>
-        <p14:section name="Close" id="{0d287cd9-6938-2db0-795f-4fd824d4b98b}">
+        <p14:section name="Close" id="{4d74159c-4713-8731-db9b-da7fee15f61d}">
           <p14:sldIdLst>
             <p14:sldId id="272"/>
           </p14:sldIdLst>
         </p14:section>
-        <p14:section name="Answers" id="{f74a56b1-b50d-7279-bb18-b2c22acbbb94}">
+        <p14:section name="Answers" id="{c825697b-e494-bf1a-b3d6-187f60083d0b}">
           <p14:sldIdLst>
             <p14:sldId id="273"/>
             <p14:sldId id="274"/>
@@ -768,7 +768,7 @@
               <a:t>Teach — Reducing the risk from rising sea levels. Say it in your own words, then check understanding with a quick question: ask a pupil from the pre-teach group first, since they met these words and ideas before the lesson. Pupils try to recall before you re-explain.
 As the world gets warmer, ice on land melts and the sea rises, by up to 2 m by 2100 on the projection your deck used. Low-lying countries are preparing by building new, better flood defences. The other option is to change the land use along the coast so that, if the sea does come in, only farmland is lost rather than homes and businesses.
 The Maldives is the sharpest example. Its roughly 1000 islands are very low-lying, and many places are only 2.5 m above sea level, so a 2 m rise would flood much of the country. Sea walls have been built to hold the water back and protect property. After the islands were flooded by the 2004 tsunami, a 3 m high wall was built around the capital, Malé, paid for by Japan, and land is being reclaimed from the sea.
-In the UK, sea levels in the Thames Estuary could rise by up to 2 m by 2100. The Thames Barrier, built after the 1953 floods and completed in 1984, protects the estuary from flooding; its huge steel gates can be raised in 45 minutes. Along the river, flood defences are being raised and flood-water storage areas created, so that London is protected from future floods caused by higher seas, higher and more frequent storm surges and higher river flows. If sea levels rise by 4 m, a new barrage would be built across the estuary.
+In the UK, sea levels in the Thames Estuary could rise by up to 2 m by 2100. The Thames Barrier, built after the 1953 floods and completed in 1984, protects the estuary from flooding; its huge steel gates can be raised in 45 minutes. Along the river, defences are being built higher and new basins dug to hold flood water back, keeping London safe from future floods caused by higher seas, higher and more frequent storm surges and higher river flows. If sea levels rise by 4 m, a new barrage would be built across the estuary.
 Tip: Give the Maldives figures (2.5 m, 2 m, 3 m wall) and the Thames figures (1953, 1984, 45 minutes, 2 m, 4 m). Numbers turn a description into a case study.</a:t>
             </a:r>
             <a:endParaRPr lang="en-US" dirty="0"/>
@@ -2259,7 +2259,7 @@
 The type of farming found in a place depends on its rainfall and temperature. Some crops grow well in hot, wet climates, such as rice; others suit cooler climates, such as oats. As rainfall and temperature rise or fall, farmers have to change the crops they grow, or switch to a different land use altogether, such as woodland. Your deck's pictures were a vineyard at Scaynes Hill in West Sussex and a wheat field in Buckinghamshire: grapes are a crop that southern England's warming climate now allows.
 The figures show change already under way. Between 2011 and 2015, in thousands of hectares, cereals rose from 3000 to 3100 and woodland from 786 to 961, while oilseeds fell from 742 to 670, potatoes from 142 to 129 and horticultural crops from 175 to 174. So more cereals are being grown and the area of woodland is increasing, while oilseeds and potatoes shrink. In 2016 the UK mean temperature was 9.2°C, which is 0.4°C above the 1981 to 2010 long-term average, and rainfall was 1272 mm, 110% of that average. Climate change could mean a UK that is warmer and wetter than before.
 Changing what is grown helps a country adapt because food keeps coming even as the climate shifts, farmers keep their income, and land that no longer suits one crop is put to a use that fits the new conditions. The cost is that change is expensive and uncertain for the farmer, and some traditional crops and landscapes are lost.
-Worked example — model it step by step, thinking aloud: In 2016 the UK mean temperature was 9.2°C, 0.4°C above the 1981 to 2010 average, and rainfall was 1272 mm, 110% of that average. What were the long-term average temperature and rainfall? (1) Temperature: 2016 was 0.4°C above the average, so the average is 9.2 − 0.4 = 8.8°C. (2) Rainfall: 1272 mm is 110% of the average, so the average is 1272 ÷ 1.10, which is about 1156 mm. (3) Check the sense: 1156 mm is lower than 1272 mm, as it should be if 2016 was wetter than usual. (4) Use both figures to say what the data suggests: a year that was both warmer and wetter than the long-term normal. Answer: Average temperature 8.8°C; average rainfall about 1156 mm..
+Worked example — model it step by step, thinking aloud: The UK's mean temperature in 2016 reached 9.2°C, 0.4°C above the 1981 to 2010 average, and its rainfall came to 1272 mm, 110% of that average. What were the long-term average temperature and rainfall? (1) Temperature: 2016 was 0.4°C above the average, so the average is 9.2 − 0.4 = 8.8°C. (2) Rainfall: 1272 mm is 110% of the average, so the average is 1272 ÷ 1.10, which is about 1156 mm. (3) Check the sense: 1156 mm is lower than 1272 mm, as it should be if 2016 was wetter than usual. (4) Use both figures to say what the data suggests: a year that was both warmer and wetter than the long-term normal. Answer: Average temperature 8.8°C; average rainfall about 1156 mm..
 Tip: For agriculture, pair a trend with a figure: more cereals (3000 to 3100 thousand hectares) and more woodland (786 to 961), fewer oilseeds and potatoes.</a:t>
             </a:r>
             <a:endParaRPr lang="en-US" dirty="0"/>
@@ -2352,7 +2352,7 @@
 The type of farming found in a place depends on its rainfall and temperature. Some crops grow well in hot, wet climates, such as rice; others suit cooler climates, such as oats. As rainfall and temperature rise or fall, farmers have to change the crops they grow, or switch to a different land use altogether, such as woodland. Your deck's pictures were a vineyard at Scaynes Hill in West Sussex and a wheat field in Buckinghamshire: grapes are a crop that southern England's warming climate now allows.
 The figures show change already under way. Between 2011 and 2015, in thousands of hectares, cereals rose from 3000 to 3100 and woodland from 786 to 961, while oilseeds fell from 742 to 670, potatoes from 142 to 129 and horticultural crops from 175 to 174. So more cereals are being grown and the area of woodland is increasing, while oilseeds and potatoes shrink. In 2016 the UK mean temperature was 9.2°C, which is 0.4°C above the 1981 to 2010 long-term average, and rainfall was 1272 mm, 110% of that average. Climate change could mean a UK that is warmer and wetter than before.
 Changing what is grown helps a country adapt because food keeps coming even as the climate shifts, farmers keep their income, and land that no longer suits one crop is put to a use that fits the new conditions. The cost is that change is expensive and uncertain for the farmer, and some traditional crops and landscapes are lost.
-Worked example — model it step by step, thinking aloud: In 2016 the UK mean temperature was 9.2°C, 0.4°C above the 1981 to 2010 average, and rainfall was 1272 mm, 110% of that average. What were the long-term average temperature and rainfall? (1) Temperature: 2016 was 0.4°C above the average, so the average is 9.2 − 0.4 = 8.8°C. (2) Rainfall: 1272 mm is 110% of the average, so the average is 1272 ÷ 1.10, which is about 1156 mm. (3) Check the sense: 1156 mm is lower than 1272 mm, as it should be if 2016 was wetter than usual. (4) Use both figures to say what the data suggests: a year that was both warmer and wetter than the long-term normal. Answer: Average temperature 8.8°C; average rainfall about 1156 mm..
+Worked example — model it step by step, thinking aloud: The UK's mean temperature in 2016 reached 9.2°C, 0.4°C above the 1981 to 2010 average, and its rainfall came to 1272 mm, 110% of that average. What were the long-term average temperature and rainfall? (1) Temperature: 2016 was 0.4°C above the average, so the average is 9.2 − 0.4 = 8.8°C. (2) Rainfall: 1272 mm is 110% of the average, so the average is 1272 ÷ 1.10, which is about 1156 mm. (3) Check the sense: 1156 mm is lower than 1272 mm, as it should be if 2016 was wetter than usual. (4) Use both figures to say what the data suggests: a year that was both warmer and wetter than the long-term normal. Answer: Average temperature 8.8°C; average rainfall about 1156 mm..
 Tip: For agriculture, pair a trend with a figure: more cereals (3000 to 3100 thousand hectares) and more woodland (786 to 961), fewer oilseeds and potatoes.</a:t>
             </a:r>
             <a:endParaRPr lang="en-US" dirty="0"/>
@@ -17280,7 +17280,7 @@
                 <a:ea typeface="Calibri" pitchFamily="34" charset="-122"/>
                 <a:cs typeface="Calibri" pitchFamily="34" charset="-120"/>
               </a:rPr>
-              <a:t>In 2016 the UK mean temperature was 9.2°C, 0.4°C above the 1981 to 2010 average, and rainfall was 1272 mm, 110% of that average. What were the long-term average temperature and rainfall?</a:t>
+              <a:t>The UK's mean temperature in 2016 reached 9.2°C, 0.4°C above the 1981 to 2010 average, and its rainfall came to 1272 mm, 110% of that average. What were the long-term average temperature and rainfall?</a:t>
             </a:r>
             <a:endParaRPr lang="en-US" sz="2000" dirty="0"/>
           </a:p>
